--- a/Review.pptx
+++ b/Review.pptx
@@ -270,7 +270,7 @@
       </p:grpSpPr>
       <p:sp>
         <p:nvSpPr>
-          <p:cNvPr id="1495683560" name="Google Shape;3;n"/>
+          <p:cNvPr id="1304858495" name="Google Shape;3;n"/>
           <p:cNvSpPr txBox="1">
             <a:spLocks noGrp="1"/>
           </p:cNvSpPr>
@@ -505,7 +505,7 @@
       </p:sp>
       <p:sp>
         <p:nvSpPr>
-          <p:cNvPr id="2009030328" name="Google Shape;4;n"/>
+          <p:cNvPr id="620073548" name="Google Shape;4;n"/>
           <p:cNvSpPr txBox="1">
             <a:spLocks noGrp="1"/>
           </p:cNvSpPr>
@@ -740,7 +740,7 @@
       </p:sp>
       <p:sp>
         <p:nvSpPr>
-          <p:cNvPr id="915250948" name="Google Shape;5;n"/>
+          <p:cNvPr id="1924316084" name="Google Shape;5;n"/>
           <p:cNvSpPr>
             <a:spLocks noChangeAspect="1" noGrp="1" noRot="1"/>
           </p:cNvSpPr>
@@ -791,7 +791,7 @@
       </p:sp>
       <p:sp>
         <p:nvSpPr>
-          <p:cNvPr id="1014437673" name="Google Shape;6;n"/>
+          <p:cNvPr id="1196414941" name="Google Shape;6;n"/>
           <p:cNvSpPr txBox="1">
             <a:spLocks noGrp="1"/>
           </p:cNvSpPr>
@@ -1053,7 +1053,7 @@
       </p:sp>
       <p:sp>
         <p:nvSpPr>
-          <p:cNvPr id="245327127" name="Google Shape;7;n"/>
+          <p:cNvPr id="1247230701" name="Google Shape;7;n"/>
           <p:cNvSpPr txBox="1">
             <a:spLocks noGrp="1"/>
           </p:cNvSpPr>
@@ -1288,7 +1288,7 @@
       </p:sp>
       <p:sp>
         <p:nvSpPr>
-          <p:cNvPr id="594560095" name="Google Shape;8;n"/>
+          <p:cNvPr id="1752154897" name="Google Shape;8;n"/>
           <p:cNvSpPr txBox="1">
             <a:spLocks noGrp="1"/>
           </p:cNvSpPr>
@@ -1597,7 +1597,7 @@
       </p:grpSpPr>
       <p:sp>
         <p:nvSpPr>
-          <p:cNvPr id="193820769" name="Google Shape;145;p1:notes"/>
+          <p:cNvPr id="1263982370" name="Google Shape;145;p1:notes"/>
           <p:cNvSpPr>
             <a:spLocks noChangeAspect="1" noGrp="1" noRot="1"/>
           </p:cNvSpPr>
@@ -1648,7 +1648,7 @@
       </p:sp>
       <p:sp>
         <p:nvSpPr>
-          <p:cNvPr id="230875178" name="Google Shape;146;p1:notes"/>
+          <p:cNvPr id="1117896737" name="Google Shape;146;p1:notes"/>
           <p:cNvSpPr txBox="1">
             <a:spLocks noGrp="1"/>
           </p:cNvSpPr>
@@ -1699,7 +1699,7 @@
       </p:sp>
       <p:sp>
         <p:nvSpPr>
-          <p:cNvPr id="103640279" name="Google Shape;147;p1:notes"/>
+          <p:cNvPr id="431916328" name="Google Shape;147;p1:notes"/>
           <p:cNvSpPr txBox="1">
             <a:spLocks noGrp="1"/>
           </p:cNvSpPr>
@@ -1747,7 +1747,7 @@
       </p:sp>
       <p:sp>
         <p:nvSpPr>
-          <p:cNvPr id="454488198" name="Google Shape;148;p1:notes"/>
+          <p:cNvPr id="1519263200" name="Google Shape;148;p1:notes"/>
           <p:cNvSpPr txBox="1">
             <a:spLocks noGrp="1"/>
           </p:cNvSpPr>
@@ -1795,7 +1795,7 @@
       </p:sp>
       <p:sp>
         <p:nvSpPr>
-          <p:cNvPr id="1218427514" name="Google Shape;149;p1:notes"/>
+          <p:cNvPr id="783958261" name="Google Shape;149;p1:notes"/>
           <p:cNvSpPr txBox="1">
             <a:spLocks noGrp="1"/>
           </p:cNvSpPr>
@@ -1847,7 +1847,7 @@
       </p:sp>
       <p:sp>
         <p:nvSpPr>
-          <p:cNvPr id="1031767334" name="Google Shape;150;p1:notes"/>
+          <p:cNvPr id="426466321" name="Google Shape;150;p1:notes"/>
           <p:cNvSpPr txBox="1">
             <a:spLocks noGrp="1"/>
           </p:cNvSpPr>
@@ -1921,7 +1921,7 @@
       </p:grpSpPr>
       <p:sp>
         <p:nvSpPr>
-          <p:cNvPr id="2016325875" name="Google Shape;233;p10:notes"/>
+          <p:cNvPr id="1936415951" name="Google Shape;233;p10:notes"/>
           <p:cNvSpPr txBox="1">
             <a:spLocks noGrp="1"/>
           </p:cNvSpPr>
@@ -1968,7 +1968,7 @@
       </p:sp>
       <p:sp>
         <p:nvSpPr>
-          <p:cNvPr id="1105248841" name="Google Shape;234;p10:notes"/>
+          <p:cNvPr id="884900788" name="Google Shape;234;p10:notes"/>
           <p:cNvSpPr>
             <a:spLocks noChangeAspect="1" noGrp="1" noRot="1"/>
           </p:cNvSpPr>
@@ -2041,7 +2041,7 @@
       </p:grpSpPr>
       <p:sp>
         <p:nvSpPr>
-          <p:cNvPr id="2097430279" name="Google Shape;157;p2:notes"/>
+          <p:cNvPr id="332909028" name="Google Shape;157;p2:notes"/>
           <p:cNvSpPr>
             <a:spLocks noChangeAspect="1" noGrp="1" noRot="1"/>
           </p:cNvSpPr>
@@ -2092,7 +2092,7 @@
       </p:sp>
       <p:sp>
         <p:nvSpPr>
-          <p:cNvPr id="129342971" name="Google Shape;158;p2:notes"/>
+          <p:cNvPr id="1747799180" name="Google Shape;158;p2:notes"/>
           <p:cNvSpPr txBox="1">
             <a:spLocks noGrp="1"/>
           </p:cNvSpPr>
@@ -2143,7 +2143,7 @@
       </p:sp>
       <p:sp>
         <p:nvSpPr>
-          <p:cNvPr id="478652765" name="Google Shape;159;p2:notes"/>
+          <p:cNvPr id="942093153" name="Google Shape;159;p2:notes"/>
           <p:cNvSpPr txBox="1">
             <a:spLocks noGrp="1"/>
           </p:cNvSpPr>
@@ -2191,7 +2191,7 @@
       </p:sp>
       <p:sp>
         <p:nvSpPr>
-          <p:cNvPr id="421202940" name="Google Shape;160;p2:notes"/>
+          <p:cNvPr id="2031951934" name="Google Shape;160;p2:notes"/>
           <p:cNvSpPr txBox="1">
             <a:spLocks noGrp="1"/>
           </p:cNvSpPr>
@@ -2239,7 +2239,7 @@
       </p:sp>
       <p:sp>
         <p:nvSpPr>
-          <p:cNvPr id="138214151" name="Google Shape;161;p2:notes"/>
+          <p:cNvPr id="1203741115" name="Google Shape;161;p2:notes"/>
           <p:cNvSpPr txBox="1">
             <a:spLocks noGrp="1"/>
           </p:cNvSpPr>
@@ -2291,7 +2291,7 @@
       </p:sp>
       <p:sp>
         <p:nvSpPr>
-          <p:cNvPr id="1407712630" name="Google Shape;162;p2:notes"/>
+          <p:cNvPr id="1348872605" name="Google Shape;162;p2:notes"/>
           <p:cNvSpPr txBox="1">
             <a:spLocks noGrp="1"/>
           </p:cNvSpPr>
@@ -2365,7 +2365,7 @@
       </p:grpSpPr>
       <p:sp>
         <p:nvSpPr>
-          <p:cNvPr id="613240970" name="Google Shape;169;p3:notes"/>
+          <p:cNvPr id="240447649" name="Google Shape;169;p3:notes"/>
           <p:cNvSpPr>
             <a:spLocks noChangeAspect="1" noGrp="1" noRot="1"/>
           </p:cNvSpPr>
@@ -2416,7 +2416,7 @@
       </p:sp>
       <p:sp>
         <p:nvSpPr>
-          <p:cNvPr id="370949622" name="Google Shape;170;p3:notes"/>
+          <p:cNvPr id="326820189" name="Google Shape;170;p3:notes"/>
           <p:cNvSpPr txBox="1">
             <a:spLocks noGrp="1"/>
           </p:cNvSpPr>
@@ -2467,7 +2467,7 @@
       </p:sp>
       <p:sp>
         <p:nvSpPr>
-          <p:cNvPr id="893845662" name="Google Shape;171;p3:notes"/>
+          <p:cNvPr id="1221605305" name="Google Shape;171;p3:notes"/>
           <p:cNvSpPr txBox="1">
             <a:spLocks noGrp="1"/>
           </p:cNvSpPr>
@@ -2515,7 +2515,7 @@
       </p:sp>
       <p:sp>
         <p:nvSpPr>
-          <p:cNvPr id="1901460990" name="Google Shape;172;p3:notes"/>
+          <p:cNvPr id="162226524" name="Google Shape;172;p3:notes"/>
           <p:cNvSpPr txBox="1">
             <a:spLocks noGrp="1"/>
           </p:cNvSpPr>
@@ -2567,7 +2567,7 @@
       </p:sp>
       <p:sp>
         <p:nvSpPr>
-          <p:cNvPr id="769575717" name="Google Shape;173;p3:notes"/>
+          <p:cNvPr id="2067531416" name="Google Shape;173;p3:notes"/>
           <p:cNvSpPr txBox="1">
             <a:spLocks noGrp="1"/>
           </p:cNvSpPr>
@@ -2615,7 +2615,7 @@
       </p:sp>
       <p:sp>
         <p:nvSpPr>
-          <p:cNvPr id="2076194619" name="Google Shape;174;p3:notes"/>
+          <p:cNvPr id="157381983" name="Google Shape;174;p3:notes"/>
           <p:cNvSpPr txBox="1">
             <a:spLocks noGrp="1"/>
           </p:cNvSpPr>
@@ -2689,7 +2689,7 @@
       </p:grpSpPr>
       <p:sp>
         <p:nvSpPr>
-          <p:cNvPr id="338845009" name="Google Shape;181;p4:notes"/>
+          <p:cNvPr id="757307994" name="Google Shape;181;p4:notes"/>
           <p:cNvSpPr txBox="1">
             <a:spLocks noGrp="1"/>
           </p:cNvSpPr>
@@ -2728,7 +2728,7 @@
       </p:sp>
       <p:sp>
         <p:nvSpPr>
-          <p:cNvPr id="1560938431" name="Google Shape;182;p4:notes"/>
+          <p:cNvPr id="244280777" name="Google Shape;182;p4:notes"/>
           <p:cNvSpPr>
             <a:spLocks noChangeAspect="1" noGrp="1" noRot="1"/>
           </p:cNvSpPr>
@@ -2791,7 +2791,7 @@
       </p:grpSpPr>
       <p:sp>
         <p:nvSpPr>
-          <p:cNvPr id="1106629805" name="Google Shape;188;p5:notes"/>
+          <p:cNvPr id="618982516" name="Google Shape;188;p5:notes"/>
           <p:cNvSpPr>
             <a:spLocks noChangeAspect="1" noGrp="1" noRot="1"/>
           </p:cNvSpPr>
@@ -2842,7 +2842,7 @@
       </p:sp>
       <p:sp>
         <p:nvSpPr>
-          <p:cNvPr id="1631309982" name="Google Shape;189;p5:notes"/>
+          <p:cNvPr id="525584696" name="Google Shape;189;p5:notes"/>
           <p:cNvSpPr txBox="1">
             <a:spLocks noGrp="1"/>
           </p:cNvSpPr>
@@ -2893,7 +2893,7 @@
       </p:sp>
       <p:sp>
         <p:nvSpPr>
-          <p:cNvPr id="299248216" name="Google Shape;190;p5:notes"/>
+          <p:cNvPr id="2004710942" name="Google Shape;190;p5:notes"/>
           <p:cNvSpPr txBox="1">
             <a:spLocks noGrp="1"/>
           </p:cNvSpPr>
@@ -2941,7 +2941,7 @@
       </p:sp>
       <p:sp>
         <p:nvSpPr>
-          <p:cNvPr id="1524980707" name="Google Shape;191;p5:notes"/>
+          <p:cNvPr id="1302361422" name="Google Shape;191;p5:notes"/>
           <p:cNvSpPr txBox="1">
             <a:spLocks noGrp="1"/>
           </p:cNvSpPr>
@@ -2993,7 +2993,7 @@
       </p:sp>
       <p:sp>
         <p:nvSpPr>
-          <p:cNvPr id="1584436237" name="Google Shape;192;p5:notes"/>
+          <p:cNvPr id="1444678457" name="Google Shape;192;p5:notes"/>
           <p:cNvSpPr txBox="1">
             <a:spLocks noGrp="1"/>
           </p:cNvSpPr>
@@ -3041,7 +3041,7 @@
       </p:sp>
       <p:sp>
         <p:nvSpPr>
-          <p:cNvPr id="584236709" name="Google Shape;193;p5:notes"/>
+          <p:cNvPr id="808585199" name="Google Shape;193;p5:notes"/>
           <p:cNvSpPr txBox="1">
             <a:spLocks noGrp="1"/>
           </p:cNvSpPr>
@@ -3115,7 +3115,7 @@
       </p:grpSpPr>
       <p:sp>
         <p:nvSpPr>
-          <p:cNvPr id="730516457" name="Google Shape;200;p6:notes"/>
+          <p:cNvPr id="1722245575" name="Google Shape;200;p6:notes"/>
           <p:cNvSpPr>
             <a:spLocks noChangeAspect="1" noGrp="1" noRot="1"/>
           </p:cNvSpPr>
@@ -3166,7 +3166,7 @@
       </p:sp>
       <p:sp>
         <p:nvSpPr>
-          <p:cNvPr id="904619252" name="Google Shape;201;p6:notes"/>
+          <p:cNvPr id="490306170" name="Google Shape;201;p6:notes"/>
           <p:cNvSpPr txBox="1">
             <a:spLocks noGrp="1"/>
           </p:cNvSpPr>
@@ -3213,7 +3213,7 @@
       </p:sp>
       <p:sp>
         <p:nvSpPr>
-          <p:cNvPr id="890257655" name="Google Shape;202;p6:notes"/>
+          <p:cNvPr id="2107532368" name="Google Shape;202;p6:notes"/>
           <p:cNvSpPr txBox="1">
             <a:spLocks noGrp="1"/>
           </p:cNvSpPr>
@@ -3261,7 +3261,7 @@
       </p:sp>
       <p:sp>
         <p:nvSpPr>
-          <p:cNvPr id="107081326" name="Google Shape;203;p6:notes"/>
+          <p:cNvPr id="527638843" name="Google Shape;203;p6:notes"/>
           <p:cNvSpPr txBox="1">
             <a:spLocks noGrp="1"/>
           </p:cNvSpPr>
@@ -3313,7 +3313,7 @@
       </p:sp>
       <p:sp>
         <p:nvSpPr>
-          <p:cNvPr id="913252498" name="Google Shape;204;p6:notes"/>
+          <p:cNvPr id="1134501689" name="Google Shape;204;p6:notes"/>
           <p:cNvSpPr txBox="1">
             <a:spLocks noGrp="1"/>
           </p:cNvSpPr>
@@ -3361,7 +3361,7 @@
       </p:sp>
       <p:sp>
         <p:nvSpPr>
-          <p:cNvPr id="270811968" name="Google Shape;205;p6:notes"/>
+          <p:cNvPr id="1482895364" name="Google Shape;205;p6:notes"/>
           <p:cNvSpPr txBox="1">
             <a:spLocks noGrp="1"/>
           </p:cNvSpPr>
@@ -3435,7 +3435,7 @@
       </p:grpSpPr>
       <p:sp>
         <p:nvSpPr>
-          <p:cNvPr id="1098225905" name="Google Shape;212;p7:notes"/>
+          <p:cNvPr id="433478254" name="Google Shape;212;p7:notes"/>
           <p:cNvSpPr txBox="1">
             <a:spLocks noGrp="1"/>
           </p:cNvSpPr>
@@ -3474,7 +3474,7 @@
       </p:sp>
       <p:sp>
         <p:nvSpPr>
-          <p:cNvPr id="1873579378" name="Google Shape;213;p7:notes"/>
+          <p:cNvPr id="1084610719" name="Google Shape;213;p7:notes"/>
           <p:cNvSpPr>
             <a:spLocks noChangeAspect="1" noGrp="1" noRot="1"/>
           </p:cNvSpPr>
@@ -3537,7 +3537,7 @@
       </p:grpSpPr>
       <p:sp>
         <p:nvSpPr>
-          <p:cNvPr id="2066076407" name="Google Shape;219;p8:notes"/>
+          <p:cNvPr id="898619412" name="Google Shape;219;p8:notes"/>
           <p:cNvSpPr txBox="1">
             <a:spLocks noGrp="1"/>
           </p:cNvSpPr>
@@ -3576,7 +3576,7 @@
       </p:sp>
       <p:sp>
         <p:nvSpPr>
-          <p:cNvPr id="263415301" name="Google Shape;220;p8:notes"/>
+          <p:cNvPr id="1124739871" name="Google Shape;220;p8:notes"/>
           <p:cNvSpPr>
             <a:spLocks noChangeAspect="1" noGrp="1" noRot="1"/>
           </p:cNvSpPr>
@@ -3639,7 +3639,7 @@
       </p:grpSpPr>
       <p:sp>
         <p:nvSpPr>
-          <p:cNvPr id="980946303" name="Google Shape;226;p9:notes"/>
+          <p:cNvPr id="237556444" name="Google Shape;226;p9:notes"/>
           <p:cNvSpPr txBox="1">
             <a:spLocks noGrp="1"/>
           </p:cNvSpPr>
@@ -3678,7 +3678,7 @@
       </p:sp>
       <p:sp>
         <p:nvSpPr>
-          <p:cNvPr id="955108840" name="Google Shape;227;p9:notes"/>
+          <p:cNvPr id="1013201648" name="Google Shape;227;p9:notes"/>
           <p:cNvSpPr>
             <a:spLocks noChangeAspect="1" noGrp="1" noRot="1"/>
           </p:cNvSpPr>
@@ -3741,7 +3741,7 @@
       </p:grpSpPr>
       <p:grpSp>
         <p:nvGrpSpPr>
-          <p:cNvPr id="104623078" name="Google Shape;23;p2"/>
+          <p:cNvPr id="665362201" name="Google Shape;23;p2"/>
           <p:cNvGrpSpPr/>
           <p:nvPr/>
         </p:nvGrpSpPr>
@@ -4050,7 +4050,7 @@
       </p:grpSp>
       <p:sp>
         <p:nvSpPr>
-          <p:cNvPr id="1689224662" name="Google Shape;30;p2"/>
+          <p:cNvPr id="1537775065" name="Google Shape;30;p2"/>
           <p:cNvSpPr txBox="1">
             <a:spLocks noGrp="1"/>
           </p:cNvSpPr>
@@ -4190,7 +4190,7 @@
       </p:sp>
       <p:sp>
         <p:nvSpPr>
-          <p:cNvPr id="758054613" name="Google Shape;31;p2"/>
+          <p:cNvPr id="175652928" name="Google Shape;31;p2"/>
           <p:cNvSpPr txBox="1">
             <a:spLocks noGrp="1"/>
           </p:cNvSpPr>
@@ -4362,7 +4362,7 @@
       </p:sp>
       <p:sp>
         <p:nvSpPr>
-          <p:cNvPr id="151163746" name="Google Shape;32;p2"/>
+          <p:cNvPr id="433906792" name="Google Shape;32;p2"/>
           <p:cNvSpPr txBox="1">
             <a:spLocks noGrp="1"/>
           </p:cNvSpPr>
@@ -4498,7 +4498,7 @@
       </p:sp>
       <p:sp>
         <p:nvSpPr>
-          <p:cNvPr id="862930176" name="Google Shape;33;p2"/>
+          <p:cNvPr id="1375566378" name="Google Shape;33;p2"/>
           <p:cNvSpPr txBox="1">
             <a:spLocks noGrp="1"/>
           </p:cNvSpPr>
@@ -4634,7 +4634,7 @@
       </p:sp>
       <p:sp>
         <p:nvSpPr>
-          <p:cNvPr id="1065088491" name="Google Shape;34;p2"/>
+          <p:cNvPr id="1256034285" name="Google Shape;34;p2"/>
           <p:cNvSpPr txBox="1">
             <a:spLocks noGrp="1"/>
           </p:cNvSpPr>
@@ -4817,7 +4817,7 @@
       </p:sp>
       <p:sp>
         <p:nvSpPr>
-          <p:cNvPr id="1956144459" name="Google Shape;35;p2"/>
+          <p:cNvPr id="1017914538" name="Google Shape;35;p2"/>
           <p:cNvSpPr/>
           <p:nvPr/>
         </p:nvSpPr>
@@ -4860,7 +4860,7 @@
       </p:sp>
       <p:sp>
         <p:nvSpPr>
-          <p:cNvPr id="1325278660" name="Google Shape;36;p2"/>
+          <p:cNvPr id="628394853" name="Google Shape;36;p2"/>
           <p:cNvSpPr/>
           <p:nvPr/>
         </p:nvSpPr>
@@ -4928,7 +4928,7 @@
       </p:grpSpPr>
       <p:sp>
         <p:nvSpPr>
-          <p:cNvPr id="207382726" name="Google Shape;89;p11"/>
+          <p:cNvPr id="1124675618" name="Google Shape;89;p11"/>
           <p:cNvSpPr txBox="1">
             <a:spLocks noGrp="1"/>
           </p:cNvSpPr>
@@ -5068,7 +5068,7 @@
       </p:sp>
       <p:sp>
         <p:nvSpPr>
-          <p:cNvPr id="360693716" name="Google Shape;90;p11"/>
+          <p:cNvPr id="1608758705" name="Google Shape;90;p11"/>
           <p:cNvSpPr>
             <a:spLocks noGrp="1"/>
           </p:cNvSpPr>
@@ -5100,7 +5100,7 @@
       </p:sp>
       <p:sp>
         <p:nvSpPr>
-          <p:cNvPr id="34795254" name="Google Shape;91;p11"/>
+          <p:cNvPr id="1102979428" name="Google Shape;91;p11"/>
           <p:cNvSpPr txBox="1">
             <a:spLocks noGrp="1"/>
           </p:cNvSpPr>
@@ -5236,7 +5236,7 @@
       </p:sp>
       <p:sp>
         <p:nvSpPr>
-          <p:cNvPr id="1438888892" name="Google Shape;92;p11"/>
+          <p:cNvPr id="556734448" name="Google Shape;92;p11"/>
           <p:cNvSpPr txBox="1">
             <a:spLocks noGrp="1"/>
           </p:cNvSpPr>
@@ -5372,7 +5372,7 @@
       </p:sp>
       <p:sp>
         <p:nvSpPr>
-          <p:cNvPr id="1144556699" name="Google Shape;93;p11"/>
+          <p:cNvPr id="1839007234" name="Google Shape;93;p11"/>
           <p:cNvSpPr txBox="1">
             <a:spLocks noGrp="1"/>
           </p:cNvSpPr>
@@ -5508,7 +5508,7 @@
       </p:sp>
       <p:sp>
         <p:nvSpPr>
-          <p:cNvPr id="1184757504" name="Google Shape;94;p11"/>
+          <p:cNvPr id="2041559421" name="Google Shape;94;p11"/>
           <p:cNvSpPr txBox="1">
             <a:spLocks noGrp="1"/>
           </p:cNvSpPr>
@@ -5716,7 +5716,7 @@
       </p:grpSpPr>
       <p:sp>
         <p:nvSpPr>
-          <p:cNvPr id="1907627102" name="Google Shape;96;p12"/>
+          <p:cNvPr id="1033645246" name="Google Shape;96;p12"/>
           <p:cNvSpPr txBox="1">
             <a:spLocks noGrp="1"/>
           </p:cNvSpPr>
@@ -5856,7 +5856,7 @@
       </p:sp>
       <p:sp>
         <p:nvSpPr>
-          <p:cNvPr id="1817254218" name="Google Shape;97;p12"/>
+          <p:cNvPr id="1537038544" name="Google Shape;97;p12"/>
           <p:cNvSpPr txBox="1">
             <a:spLocks noGrp="1"/>
           </p:cNvSpPr>
@@ -6028,7 +6028,7 @@
       </p:sp>
       <p:sp>
         <p:nvSpPr>
-          <p:cNvPr id="1988697340" name="Google Shape;98;p12"/>
+          <p:cNvPr id="631677949" name="Google Shape;98;p12"/>
           <p:cNvSpPr txBox="1">
             <a:spLocks noGrp="1"/>
           </p:cNvSpPr>
@@ -6164,7 +6164,7 @@
       </p:sp>
       <p:sp>
         <p:nvSpPr>
-          <p:cNvPr id="1027133045" name="Google Shape;99;p12"/>
+          <p:cNvPr id="1394823909" name="Google Shape;99;p12"/>
           <p:cNvSpPr txBox="1">
             <a:spLocks noGrp="1"/>
           </p:cNvSpPr>
@@ -6300,7 +6300,7 @@
       </p:sp>
       <p:sp>
         <p:nvSpPr>
-          <p:cNvPr id="1034290370" name="Google Shape;100;p12"/>
+          <p:cNvPr id="1139074605" name="Google Shape;100;p12"/>
           <p:cNvSpPr txBox="1">
             <a:spLocks noGrp="1"/>
           </p:cNvSpPr>
@@ -6508,7 +6508,7 @@
       </p:grpSpPr>
       <p:sp>
         <p:nvSpPr>
-          <p:cNvPr id="1321199379" name="Google Shape;102;p13"/>
+          <p:cNvPr id="1886424600" name="Google Shape;102;p13"/>
           <p:cNvSpPr txBox="1"/>
           <p:nvPr/>
         </p:nvSpPr>
@@ -6563,7 +6563,7 @@
       </p:sp>
       <p:sp>
         <p:nvSpPr>
-          <p:cNvPr id="525014788" name="Google Shape;103;p13"/>
+          <p:cNvPr id="1685256522" name="Google Shape;103;p13"/>
           <p:cNvSpPr txBox="1"/>
           <p:nvPr/>
         </p:nvSpPr>
@@ -6618,7 +6618,7 @@
       </p:sp>
       <p:sp>
         <p:nvSpPr>
-          <p:cNvPr id="569484129" name="Google Shape;104;p13"/>
+          <p:cNvPr id="952587640" name="Google Shape;104;p13"/>
           <p:cNvSpPr txBox="1">
             <a:spLocks noGrp="1"/>
           </p:cNvSpPr>
@@ -6762,7 +6762,7 @@
       </p:sp>
       <p:sp>
         <p:nvSpPr>
-          <p:cNvPr id="2057505717" name="Google Shape;105;p13"/>
+          <p:cNvPr id="509060784" name="Google Shape;105;p13"/>
           <p:cNvSpPr txBox="1">
             <a:spLocks noGrp="1"/>
           </p:cNvSpPr>
@@ -6903,7 +6903,7 @@
       </p:sp>
       <p:sp>
         <p:nvSpPr>
-          <p:cNvPr id="569286822" name="Google Shape;106;p13"/>
+          <p:cNvPr id="862767073" name="Google Shape;106;p13"/>
           <p:cNvSpPr txBox="1">
             <a:spLocks noGrp="1"/>
           </p:cNvSpPr>
@@ -7075,7 +7075,7 @@
       </p:sp>
       <p:sp>
         <p:nvSpPr>
-          <p:cNvPr id="731401321" name="Google Shape;107;p13"/>
+          <p:cNvPr id="380337030" name="Google Shape;107;p13"/>
           <p:cNvSpPr txBox="1">
             <a:spLocks noGrp="1"/>
           </p:cNvSpPr>
@@ -7211,7 +7211,7 @@
       </p:sp>
       <p:sp>
         <p:nvSpPr>
-          <p:cNvPr id="1739113673" name="Google Shape;108;p13"/>
+          <p:cNvPr id="418494960" name="Google Shape;108;p13"/>
           <p:cNvSpPr txBox="1">
             <a:spLocks noGrp="1"/>
           </p:cNvSpPr>
@@ -7347,7 +7347,7 @@
       </p:sp>
       <p:sp>
         <p:nvSpPr>
-          <p:cNvPr id="401884175" name="Google Shape;109;p13"/>
+          <p:cNvPr id="697500675" name="Google Shape;109;p13"/>
           <p:cNvSpPr txBox="1">
             <a:spLocks noGrp="1"/>
           </p:cNvSpPr>
@@ -7555,7 +7555,7 @@
       </p:grpSpPr>
       <p:sp>
         <p:nvSpPr>
-          <p:cNvPr id="855027895" name="Google Shape;111;p14"/>
+          <p:cNvPr id="2029480854" name="Google Shape;111;p14"/>
           <p:cNvSpPr txBox="1">
             <a:spLocks noGrp="1"/>
           </p:cNvSpPr>
@@ -7695,7 +7695,7 @@
       </p:sp>
       <p:sp>
         <p:nvSpPr>
-          <p:cNvPr id="1140733150" name="Google Shape;112;p14"/>
+          <p:cNvPr id="1360120360" name="Google Shape;112;p14"/>
           <p:cNvSpPr txBox="1">
             <a:spLocks noGrp="1"/>
           </p:cNvSpPr>
@@ -7867,7 +7867,7 @@
       </p:sp>
       <p:sp>
         <p:nvSpPr>
-          <p:cNvPr id="1774520595" name="Google Shape;113;p14"/>
+          <p:cNvPr id="628990311" name="Google Shape;113;p14"/>
           <p:cNvSpPr txBox="1">
             <a:spLocks noGrp="1"/>
           </p:cNvSpPr>
@@ -8003,7 +8003,7 @@
       </p:sp>
       <p:sp>
         <p:nvSpPr>
-          <p:cNvPr id="1158139943" name="Google Shape;114;p14"/>
+          <p:cNvPr id="1521136611" name="Google Shape;114;p14"/>
           <p:cNvSpPr txBox="1">
             <a:spLocks noGrp="1"/>
           </p:cNvSpPr>
@@ -8139,7 +8139,7 @@
       </p:sp>
       <p:sp>
         <p:nvSpPr>
-          <p:cNvPr id="1570300672" name="Google Shape;115;p14"/>
+          <p:cNvPr id="663132820" name="Google Shape;115;p14"/>
           <p:cNvSpPr txBox="1">
             <a:spLocks noGrp="1"/>
           </p:cNvSpPr>
@@ -8347,7 +8347,7 @@
       </p:grpSpPr>
       <p:sp>
         <p:nvSpPr>
-          <p:cNvPr id="1236906831" name="Google Shape;117;p15"/>
+          <p:cNvPr id="153552893" name="Google Shape;117;p15"/>
           <p:cNvSpPr txBox="1"/>
           <p:nvPr/>
         </p:nvSpPr>
@@ -8402,7 +8402,7 @@
       </p:sp>
       <p:sp>
         <p:nvSpPr>
-          <p:cNvPr id="654541856" name="Google Shape;118;p15"/>
+          <p:cNvPr id="857870186" name="Google Shape;118;p15"/>
           <p:cNvSpPr txBox="1"/>
           <p:nvPr/>
         </p:nvSpPr>
@@ -8457,7 +8457,7 @@
       </p:sp>
       <p:sp>
         <p:nvSpPr>
-          <p:cNvPr id="1571317976" name="Google Shape;119;p15"/>
+          <p:cNvPr id="1279329539" name="Google Shape;119;p15"/>
           <p:cNvSpPr txBox="1">
             <a:spLocks noGrp="1"/>
           </p:cNvSpPr>
@@ -8601,7 +8601,7 @@
       </p:sp>
       <p:sp>
         <p:nvSpPr>
-          <p:cNvPr id="142376468" name="Google Shape;120;p15"/>
+          <p:cNvPr id="760995797" name="Google Shape;120;p15"/>
           <p:cNvSpPr txBox="1">
             <a:spLocks noGrp="1"/>
           </p:cNvSpPr>
@@ -8741,7 +8741,7 @@
       </p:sp>
       <p:sp>
         <p:nvSpPr>
-          <p:cNvPr id="614333395" name="Google Shape;121;p15"/>
+          <p:cNvPr id="1320556530" name="Google Shape;121;p15"/>
           <p:cNvSpPr txBox="1">
             <a:spLocks noGrp="1"/>
           </p:cNvSpPr>
@@ -8913,7 +8913,7 @@
       </p:sp>
       <p:sp>
         <p:nvSpPr>
-          <p:cNvPr id="1676815164" name="Google Shape;122;p15"/>
+          <p:cNvPr id="1445780941" name="Google Shape;122;p15"/>
           <p:cNvSpPr txBox="1">
             <a:spLocks noGrp="1"/>
           </p:cNvSpPr>
@@ -9049,7 +9049,7 @@
       </p:sp>
       <p:sp>
         <p:nvSpPr>
-          <p:cNvPr id="1766337815" name="Google Shape;123;p15"/>
+          <p:cNvPr id="1861487551" name="Google Shape;123;p15"/>
           <p:cNvSpPr txBox="1">
             <a:spLocks noGrp="1"/>
           </p:cNvSpPr>
@@ -9185,7 +9185,7 @@
       </p:sp>
       <p:sp>
         <p:nvSpPr>
-          <p:cNvPr id="1646398835" name="Google Shape;124;p15"/>
+          <p:cNvPr id="1276394579" name="Google Shape;124;p15"/>
           <p:cNvSpPr txBox="1">
             <a:spLocks noGrp="1"/>
           </p:cNvSpPr>
@@ -9393,7 +9393,7 @@
       </p:grpSpPr>
       <p:sp>
         <p:nvSpPr>
-          <p:cNvPr id="1001485569" name="Google Shape;126;p16"/>
+          <p:cNvPr id="72386200" name="Google Shape;126;p16"/>
           <p:cNvSpPr txBox="1">
             <a:spLocks noGrp="1"/>
           </p:cNvSpPr>
@@ -9533,7 +9533,7 @@
       </p:sp>
       <p:sp>
         <p:nvSpPr>
-          <p:cNvPr id="799537037" name="Google Shape;127;p16"/>
+          <p:cNvPr id="279586450" name="Google Shape;127;p16"/>
           <p:cNvSpPr txBox="1">
             <a:spLocks noGrp="1"/>
           </p:cNvSpPr>
@@ -9673,7 +9673,7 @@
       </p:sp>
       <p:sp>
         <p:nvSpPr>
-          <p:cNvPr id="824548117" name="Google Shape;128;p16"/>
+          <p:cNvPr id="1695449951" name="Google Shape;128;p16"/>
           <p:cNvSpPr txBox="1">
             <a:spLocks noGrp="1"/>
           </p:cNvSpPr>
@@ -9845,7 +9845,7 @@
       </p:sp>
       <p:sp>
         <p:nvSpPr>
-          <p:cNvPr id="1401663939" name="Google Shape;129;p16"/>
+          <p:cNvPr id="1873613212" name="Google Shape;129;p16"/>
           <p:cNvSpPr txBox="1">
             <a:spLocks noGrp="1"/>
           </p:cNvSpPr>
@@ -9981,7 +9981,7 @@
       </p:sp>
       <p:sp>
         <p:nvSpPr>
-          <p:cNvPr id="1905645320" name="Google Shape;130;p16"/>
+          <p:cNvPr id="1695675678" name="Google Shape;130;p16"/>
           <p:cNvSpPr txBox="1">
             <a:spLocks noGrp="1"/>
           </p:cNvSpPr>
@@ -10117,7 +10117,7 @@
       </p:sp>
       <p:sp>
         <p:nvSpPr>
-          <p:cNvPr id="1440088544" name="Google Shape;131;p16"/>
+          <p:cNvPr id="1109157676" name="Google Shape;131;p16"/>
           <p:cNvSpPr txBox="1">
             <a:spLocks noGrp="1"/>
           </p:cNvSpPr>
@@ -10325,7 +10325,7 @@
       </p:grpSpPr>
       <p:sp>
         <p:nvSpPr>
-          <p:cNvPr id="1945271914" name="Google Shape;133;p17"/>
+          <p:cNvPr id="1310637477" name="Google Shape;133;p17"/>
           <p:cNvSpPr txBox="1">
             <a:spLocks noGrp="1"/>
           </p:cNvSpPr>
@@ -10465,7 +10465,7 @@
       </p:sp>
       <p:sp>
         <p:nvSpPr>
-          <p:cNvPr id="1912397860" name="Google Shape;134;p17"/>
+          <p:cNvPr id="1746838417" name="Google Shape;134;p17"/>
           <p:cNvSpPr txBox="1">
             <a:spLocks noGrp="1"/>
           </p:cNvSpPr>
@@ -10601,7 +10601,7 @@
       </p:sp>
       <p:sp>
         <p:nvSpPr>
-          <p:cNvPr id="376233512" name="Google Shape;135;p17"/>
+          <p:cNvPr id="2101951216" name="Google Shape;135;p17"/>
           <p:cNvSpPr txBox="1">
             <a:spLocks noGrp="1"/>
           </p:cNvSpPr>
@@ -10737,7 +10737,7 @@
       </p:sp>
       <p:sp>
         <p:nvSpPr>
-          <p:cNvPr id="1938784954" name="Google Shape;136;p17"/>
+          <p:cNvPr id="700251103" name="Google Shape;136;p17"/>
           <p:cNvSpPr txBox="1">
             <a:spLocks noGrp="1"/>
           </p:cNvSpPr>
@@ -10873,7 +10873,7 @@
       </p:sp>
       <p:sp>
         <p:nvSpPr>
-          <p:cNvPr id="153001117" name="Google Shape;137;p17"/>
+          <p:cNvPr id="1971368191" name="Google Shape;137;p17"/>
           <p:cNvSpPr txBox="1">
             <a:spLocks noGrp="1"/>
           </p:cNvSpPr>
@@ -11081,7 +11081,7 @@
       </p:grpSpPr>
       <p:sp>
         <p:nvSpPr>
-          <p:cNvPr id="1653060699" name="Google Shape;139;p18"/>
+          <p:cNvPr id="1637236354" name="Google Shape;139;p18"/>
           <p:cNvSpPr txBox="1">
             <a:spLocks noGrp="1"/>
           </p:cNvSpPr>
@@ -11220,7 +11220,7 @@
       </p:sp>
       <p:sp>
         <p:nvSpPr>
-          <p:cNvPr id="215982216" name="Google Shape;140;p18"/>
+          <p:cNvPr id="913961563" name="Google Shape;140;p18"/>
           <p:cNvSpPr txBox="1">
             <a:spLocks noGrp="1"/>
           </p:cNvSpPr>
@@ -11356,7 +11356,7 @@
       </p:sp>
       <p:sp>
         <p:nvSpPr>
-          <p:cNvPr id="365312625" name="Google Shape;141;p18"/>
+          <p:cNvPr id="798219946" name="Google Shape;141;p18"/>
           <p:cNvSpPr txBox="1">
             <a:spLocks noGrp="1"/>
           </p:cNvSpPr>
@@ -11492,7 +11492,7 @@
       </p:sp>
       <p:sp>
         <p:nvSpPr>
-          <p:cNvPr id="1128464452" name="Google Shape;142;p18"/>
+          <p:cNvPr id="1303394582" name="Google Shape;142;p18"/>
           <p:cNvSpPr txBox="1">
             <a:spLocks noGrp="1"/>
           </p:cNvSpPr>
@@ -11628,7 +11628,7 @@
       </p:sp>
       <p:sp>
         <p:nvSpPr>
-          <p:cNvPr id="2081052277" name="Google Shape;143;p18"/>
+          <p:cNvPr id="1121224148" name="Google Shape;143;p18"/>
           <p:cNvSpPr txBox="1">
             <a:spLocks noGrp="1"/>
           </p:cNvSpPr>
@@ -11836,7 +11836,7 @@
       </p:grpSpPr>
       <p:sp>
         <p:nvSpPr>
-          <p:cNvPr id="1103015919" name="Google Shape;38;p3"/>
+          <p:cNvPr id="1902539275" name="Google Shape;38;p3"/>
           <p:cNvSpPr txBox="1">
             <a:spLocks noGrp="1"/>
           </p:cNvSpPr>
@@ -11975,7 +11975,7 @@
       </p:sp>
       <p:sp>
         <p:nvSpPr>
-          <p:cNvPr id="1959538980" name="Google Shape;39;p3"/>
+          <p:cNvPr id="917771852" name="Google Shape;39;p3"/>
           <p:cNvSpPr txBox="1">
             <a:spLocks noGrp="1"/>
           </p:cNvSpPr>
@@ -12111,7 +12111,7 @@
       </p:sp>
       <p:sp>
         <p:nvSpPr>
-          <p:cNvPr id="491620862" name="Google Shape;40;p3"/>
+          <p:cNvPr id="1130128865" name="Google Shape;40;p3"/>
           <p:cNvSpPr txBox="1">
             <a:spLocks noGrp="1"/>
           </p:cNvSpPr>
@@ -12247,7 +12247,7 @@
       </p:sp>
       <p:sp>
         <p:nvSpPr>
-          <p:cNvPr id="256330035" name="Google Shape;41;p3"/>
+          <p:cNvPr id="1632851364" name="Google Shape;41;p3"/>
           <p:cNvSpPr txBox="1">
             <a:spLocks noGrp="1"/>
           </p:cNvSpPr>
@@ -12383,7 +12383,7 @@
       </p:sp>
       <p:sp>
         <p:nvSpPr>
-          <p:cNvPr id="1598658392" name="Google Shape;42;p3"/>
+          <p:cNvPr id="1039779375" name="Google Shape;42;p3"/>
           <p:cNvSpPr txBox="1">
             <a:spLocks noGrp="1"/>
           </p:cNvSpPr>
@@ -12591,7 +12591,7 @@
       </p:grpSpPr>
       <p:sp>
         <p:nvSpPr>
-          <p:cNvPr id="382824146" name="Google Shape;44;p4"/>
+          <p:cNvPr id="834895737" name="Google Shape;44;p4"/>
           <p:cNvSpPr txBox="1">
             <a:spLocks noGrp="1"/>
           </p:cNvSpPr>
@@ -12731,7 +12731,7 @@
       </p:sp>
       <p:sp>
         <p:nvSpPr>
-          <p:cNvPr id="729640108" name="Google Shape;45;p4"/>
+          <p:cNvPr id="288720587" name="Google Shape;45;p4"/>
           <p:cNvSpPr txBox="1">
             <a:spLocks noGrp="1"/>
           </p:cNvSpPr>
@@ -12903,7 +12903,7 @@
       </p:sp>
       <p:sp>
         <p:nvSpPr>
-          <p:cNvPr id="1954820580" name="Google Shape;46;p4"/>
+          <p:cNvPr id="1043439603" name="Google Shape;46;p4"/>
           <p:cNvSpPr txBox="1">
             <a:spLocks noGrp="1"/>
           </p:cNvSpPr>
@@ -13039,7 +13039,7 @@
       </p:sp>
       <p:sp>
         <p:nvSpPr>
-          <p:cNvPr id="446212652" name="Google Shape;47;p4"/>
+          <p:cNvPr id="41350120" name="Google Shape;47;p4"/>
           <p:cNvSpPr txBox="1">
             <a:spLocks noGrp="1"/>
           </p:cNvSpPr>
@@ -13175,7 +13175,7 @@
       </p:sp>
       <p:sp>
         <p:nvSpPr>
-          <p:cNvPr id="2053092994" name="Google Shape;48;p4"/>
+          <p:cNvPr id="908818157" name="Google Shape;48;p4"/>
           <p:cNvSpPr txBox="1">
             <a:spLocks noGrp="1"/>
           </p:cNvSpPr>
@@ -13383,7 +13383,7 @@
       </p:grpSpPr>
       <p:sp>
         <p:nvSpPr>
-          <p:cNvPr id="470594725" name="Google Shape;50;p5"/>
+          <p:cNvPr id="1832901644" name="Google Shape;50;p5"/>
           <p:cNvSpPr txBox="1">
             <a:spLocks noGrp="1"/>
           </p:cNvSpPr>
@@ -13522,7 +13522,7 @@
       </p:sp>
       <p:sp>
         <p:nvSpPr>
-          <p:cNvPr id="1067300131" name="Google Shape;51;p5"/>
+          <p:cNvPr id="476414877" name="Google Shape;51;p5"/>
           <p:cNvSpPr txBox="1">
             <a:spLocks noGrp="1"/>
           </p:cNvSpPr>
@@ -13658,7 +13658,7 @@
       </p:sp>
       <p:sp>
         <p:nvSpPr>
-          <p:cNvPr id="2027079047" name="Google Shape;52;p5"/>
+          <p:cNvPr id="1688138348" name="Google Shape;52;p5"/>
           <p:cNvSpPr txBox="1">
             <a:spLocks noGrp="1"/>
           </p:cNvSpPr>
@@ -13794,7 +13794,7 @@
       </p:sp>
       <p:sp>
         <p:nvSpPr>
-          <p:cNvPr id="403341093" name="Google Shape;53;p5"/>
+          <p:cNvPr id="1113585280" name="Google Shape;53;p5"/>
           <p:cNvSpPr txBox="1">
             <a:spLocks noGrp="1"/>
           </p:cNvSpPr>
@@ -13930,7 +13930,7 @@
       </p:sp>
       <p:sp>
         <p:nvSpPr>
-          <p:cNvPr id="1075799078" name="Google Shape;54;p5"/>
+          <p:cNvPr id="800450945" name="Google Shape;54;p5"/>
           <p:cNvSpPr txBox="1">
             <a:spLocks noGrp="1"/>
           </p:cNvSpPr>
@@ -14066,7 +14066,7 @@
       </p:sp>
       <p:sp>
         <p:nvSpPr>
-          <p:cNvPr id="773190731" name="Google Shape;55;p5"/>
+          <p:cNvPr id="1802110589" name="Google Shape;55;p5"/>
           <p:cNvSpPr txBox="1">
             <a:spLocks noGrp="1"/>
           </p:cNvSpPr>
@@ -14274,7 +14274,7 @@
       </p:grpSpPr>
       <p:sp>
         <p:nvSpPr>
-          <p:cNvPr id="2057991328" name="Google Shape;57;p6"/>
+          <p:cNvPr id="1626222607" name="Google Shape;57;p6"/>
           <p:cNvSpPr txBox="1">
             <a:spLocks noGrp="1"/>
           </p:cNvSpPr>
@@ -14414,7 +14414,7 @@
       </p:sp>
       <p:sp>
         <p:nvSpPr>
-          <p:cNvPr id="1781988102" name="Google Shape;58;p6"/>
+          <p:cNvPr id="385070343" name="Google Shape;58;p6"/>
           <p:cNvSpPr txBox="1">
             <a:spLocks noGrp="1"/>
           </p:cNvSpPr>
@@ -14554,7 +14554,7 @@
       </p:sp>
       <p:sp>
         <p:nvSpPr>
-          <p:cNvPr id="1733156184" name="Google Shape;59;p6"/>
+          <p:cNvPr id="165304644" name="Google Shape;59;p6"/>
           <p:cNvSpPr txBox="1">
             <a:spLocks noGrp="1"/>
           </p:cNvSpPr>
@@ -14690,7 +14690,7 @@
       </p:sp>
       <p:sp>
         <p:nvSpPr>
-          <p:cNvPr id="192573633" name="Google Shape;60;p6"/>
+          <p:cNvPr id="521362744" name="Google Shape;60;p6"/>
           <p:cNvSpPr txBox="1">
             <a:spLocks noGrp="1"/>
           </p:cNvSpPr>
@@ -14830,7 +14830,7 @@
       </p:sp>
       <p:sp>
         <p:nvSpPr>
-          <p:cNvPr id="1825361596" name="Google Shape;61;p6"/>
+          <p:cNvPr id="500729003" name="Google Shape;61;p6"/>
           <p:cNvSpPr txBox="1">
             <a:spLocks noGrp="1"/>
           </p:cNvSpPr>
@@ -14966,7 +14966,7 @@
       </p:sp>
       <p:sp>
         <p:nvSpPr>
-          <p:cNvPr id="1631248442" name="Google Shape;62;p6"/>
+          <p:cNvPr id="1070383907" name="Google Shape;62;p6"/>
           <p:cNvSpPr txBox="1">
             <a:spLocks noGrp="1"/>
           </p:cNvSpPr>
@@ -15102,7 +15102,7 @@
       </p:sp>
       <p:sp>
         <p:nvSpPr>
-          <p:cNvPr id="1938848429" name="Google Shape;63;p6"/>
+          <p:cNvPr id="1652445677" name="Google Shape;63;p6"/>
           <p:cNvSpPr txBox="1">
             <a:spLocks noGrp="1"/>
           </p:cNvSpPr>
@@ -15238,7 +15238,7 @@
       </p:sp>
       <p:sp>
         <p:nvSpPr>
-          <p:cNvPr id="1427039308" name="Google Shape;64;p6"/>
+          <p:cNvPr id="1440683876" name="Google Shape;64;p6"/>
           <p:cNvSpPr txBox="1">
             <a:spLocks noGrp="1"/>
           </p:cNvSpPr>
@@ -15446,7 +15446,7 @@
       </p:grpSpPr>
       <p:sp>
         <p:nvSpPr>
-          <p:cNvPr id="1002372515" name="Google Shape;66;p7"/>
+          <p:cNvPr id="2085205795" name="Google Shape;66;p7"/>
           <p:cNvSpPr txBox="1">
             <a:spLocks noGrp="1"/>
           </p:cNvSpPr>
@@ -15585,7 +15585,7 @@
       </p:sp>
       <p:sp>
         <p:nvSpPr>
-          <p:cNvPr id="184685584" name="Google Shape;67;p7"/>
+          <p:cNvPr id="910793767" name="Google Shape;67;p7"/>
           <p:cNvSpPr txBox="1">
             <a:spLocks noGrp="1"/>
           </p:cNvSpPr>
@@ -15721,7 +15721,7 @@
       </p:sp>
       <p:sp>
         <p:nvSpPr>
-          <p:cNvPr id="1481303162" name="Google Shape;68;p7"/>
+          <p:cNvPr id="551185999" name="Google Shape;68;p7"/>
           <p:cNvSpPr txBox="1">
             <a:spLocks noGrp="1"/>
           </p:cNvSpPr>
@@ -15857,7 +15857,7 @@
       </p:sp>
       <p:sp>
         <p:nvSpPr>
-          <p:cNvPr id="1256496054" name="Google Shape;69;p7"/>
+          <p:cNvPr id="444279355" name="Google Shape;69;p7"/>
           <p:cNvSpPr txBox="1">
             <a:spLocks noGrp="1"/>
           </p:cNvSpPr>
@@ -16065,7 +16065,7 @@
       </p:grpSpPr>
       <p:sp>
         <p:nvSpPr>
-          <p:cNvPr id="1657367868" name="Google Shape;71;p8"/>
+          <p:cNvPr id="1437601439" name="Google Shape;71;p8"/>
           <p:cNvSpPr txBox="1">
             <a:spLocks noGrp="1"/>
           </p:cNvSpPr>
@@ -16201,7 +16201,7 @@
       </p:sp>
       <p:sp>
         <p:nvSpPr>
-          <p:cNvPr id="757793964" name="Google Shape;72;p8"/>
+          <p:cNvPr id="792220191" name="Google Shape;72;p8"/>
           <p:cNvSpPr txBox="1">
             <a:spLocks noGrp="1"/>
           </p:cNvSpPr>
@@ -16337,7 +16337,7 @@
       </p:sp>
       <p:sp>
         <p:nvSpPr>
-          <p:cNvPr id="571523176" name="Google Shape;73;p8"/>
+          <p:cNvPr id="1173479627" name="Google Shape;73;p8"/>
           <p:cNvSpPr txBox="1">
             <a:spLocks noGrp="1"/>
           </p:cNvSpPr>
@@ -16545,7 +16545,7 @@
       </p:grpSpPr>
       <p:sp>
         <p:nvSpPr>
-          <p:cNvPr id="907703820" name="Google Shape;75;p9"/>
+          <p:cNvPr id="533090065" name="Google Shape;75;p9"/>
           <p:cNvSpPr txBox="1">
             <a:spLocks noGrp="1"/>
           </p:cNvSpPr>
@@ -16685,7 +16685,7 @@
       </p:sp>
       <p:sp>
         <p:nvSpPr>
-          <p:cNvPr id="1611790522" name="Google Shape;76;p9"/>
+          <p:cNvPr id="1837756168" name="Google Shape;76;p9"/>
           <p:cNvSpPr txBox="1">
             <a:spLocks noGrp="1"/>
           </p:cNvSpPr>
@@ -16821,7 +16821,7 @@
       </p:sp>
       <p:sp>
         <p:nvSpPr>
-          <p:cNvPr id="896885605" name="Google Shape;77;p9"/>
+          <p:cNvPr id="2110614401" name="Google Shape;77;p9"/>
           <p:cNvSpPr txBox="1">
             <a:spLocks noGrp="1"/>
           </p:cNvSpPr>
@@ -16957,7 +16957,7 @@
       </p:sp>
       <p:sp>
         <p:nvSpPr>
-          <p:cNvPr id="1957145223" name="Google Shape;78;p9"/>
+          <p:cNvPr id="88230297" name="Google Shape;78;p9"/>
           <p:cNvSpPr txBox="1">
             <a:spLocks noGrp="1"/>
           </p:cNvSpPr>
@@ -17093,7 +17093,7 @@
       </p:sp>
       <p:sp>
         <p:nvSpPr>
-          <p:cNvPr id="1534202797" name="Google Shape;79;p9"/>
+          <p:cNvPr id="1606610393" name="Google Shape;79;p9"/>
           <p:cNvSpPr txBox="1">
             <a:spLocks noGrp="1"/>
           </p:cNvSpPr>
@@ -17229,7 +17229,7 @@
       </p:sp>
       <p:sp>
         <p:nvSpPr>
-          <p:cNvPr id="1538199279" name="Google Shape;80;p9"/>
+          <p:cNvPr id="979615394" name="Google Shape;80;p9"/>
           <p:cNvSpPr txBox="1">
             <a:spLocks noGrp="1"/>
           </p:cNvSpPr>
@@ -17437,7 +17437,7 @@
       </p:grpSpPr>
       <p:sp>
         <p:nvSpPr>
-          <p:cNvPr id="1517509066" name="Google Shape;82;p10"/>
+          <p:cNvPr id="1464128019" name="Google Shape;82;p10"/>
           <p:cNvSpPr txBox="1">
             <a:spLocks noGrp="1"/>
           </p:cNvSpPr>
@@ -17577,7 +17577,7 @@
       </p:sp>
       <p:sp>
         <p:nvSpPr>
-          <p:cNvPr id="43504024" name="Google Shape;83;p10"/>
+          <p:cNvPr id="822855925" name="Google Shape;83;p10"/>
           <p:cNvSpPr>
             <a:spLocks noGrp="1"/>
           </p:cNvSpPr>
@@ -17609,7 +17609,7 @@
       </p:sp>
       <p:sp>
         <p:nvSpPr>
-          <p:cNvPr id="148705717" name="Google Shape;84;p10"/>
+          <p:cNvPr id="438248892" name="Google Shape;84;p10"/>
           <p:cNvSpPr txBox="1">
             <a:spLocks noGrp="1"/>
           </p:cNvSpPr>
@@ -17745,7 +17745,7 @@
       </p:sp>
       <p:sp>
         <p:nvSpPr>
-          <p:cNvPr id="1364175909" name="Google Shape;85;p10"/>
+          <p:cNvPr id="542620859" name="Google Shape;85;p10"/>
           <p:cNvSpPr txBox="1">
             <a:spLocks noGrp="1"/>
           </p:cNvSpPr>
@@ -17881,7 +17881,7 @@
       </p:sp>
       <p:sp>
         <p:nvSpPr>
-          <p:cNvPr id="261689552" name="Google Shape;86;p10"/>
+          <p:cNvPr id="1929302745" name="Google Shape;86;p10"/>
           <p:cNvSpPr txBox="1">
             <a:spLocks noGrp="1"/>
           </p:cNvSpPr>
@@ -18017,7 +18017,7 @@
       </p:sp>
       <p:sp>
         <p:nvSpPr>
-          <p:cNvPr id="1632400272" name="Google Shape;87;p10"/>
+          <p:cNvPr id="1804931569" name="Google Shape;87;p10"/>
           <p:cNvSpPr txBox="1">
             <a:spLocks noGrp="1"/>
           </p:cNvSpPr>
@@ -18235,7 +18235,7 @@
       </p:grpSpPr>
       <p:grpSp>
         <p:nvGrpSpPr>
-          <p:cNvPr id="850138290" name="Google Shape;10;p1"/>
+          <p:cNvPr id="1792035255" name="Google Shape;10;p1"/>
           <p:cNvGrpSpPr/>
           <p:nvPr/>
         </p:nvGrpSpPr>
@@ -18532,7 +18532,7 @@
       </p:grpSp>
       <p:sp>
         <p:nvSpPr>
-          <p:cNvPr id="815936847" name="Google Shape;17;p1"/>
+          <p:cNvPr id="2013501140" name="Google Shape;17;p1"/>
           <p:cNvSpPr txBox="1">
             <a:spLocks noGrp="1"/>
           </p:cNvSpPr>
@@ -18711,7 +18711,7 @@
       </p:sp>
       <p:sp>
         <p:nvSpPr>
-          <p:cNvPr id="1171990843" name="Google Shape;18;p1"/>
+          <p:cNvPr id="486797190" name="Google Shape;18;p1"/>
           <p:cNvSpPr txBox="1">
             <a:spLocks noGrp="1"/>
           </p:cNvSpPr>
@@ -18946,7 +18946,7 @@
       </p:sp>
       <p:sp>
         <p:nvSpPr>
-          <p:cNvPr id="1719012810" name="Google Shape;19;p1"/>
+          <p:cNvPr id="653431975" name="Google Shape;19;p1"/>
           <p:cNvSpPr txBox="1">
             <a:spLocks noGrp="1"/>
           </p:cNvSpPr>
@@ -19145,7 +19145,7 @@
       </p:sp>
       <p:sp>
         <p:nvSpPr>
-          <p:cNvPr id="1177467001" name="Google Shape;20;p1"/>
+          <p:cNvPr id="179170843" name="Google Shape;20;p1"/>
           <p:cNvSpPr txBox="1">
             <a:spLocks noGrp="1"/>
           </p:cNvSpPr>
@@ -19344,7 +19344,7 @@
       </p:sp>
       <p:sp>
         <p:nvSpPr>
-          <p:cNvPr id="882054917" name="Google Shape;21;p1"/>
+          <p:cNvPr id="1723898204" name="Google Shape;21;p1"/>
           <p:cNvSpPr txBox="1">
             <a:spLocks noGrp="1"/>
           </p:cNvSpPr>
@@ -20295,7 +20295,7 @@
       </p:grpSpPr>
       <p:sp>
         <p:nvSpPr>
-          <p:cNvPr id="778446979" name="Google Shape;152;p19"/>
+          <p:cNvPr id="1702095903" name="Google Shape;152;p19"/>
           <p:cNvSpPr txBox="1">
             <a:spLocks noGrp="1"/>
           </p:cNvSpPr>
@@ -20353,7 +20353,7 @@
       </p:sp>
       <p:sp>
         <p:nvSpPr>
-          <p:cNvPr id="2100539531" name="Google Shape;153;p19"/>
+          <p:cNvPr id="929221446" name="Google Shape;153;p19"/>
           <p:cNvSpPr txBox="1">
             <a:spLocks noGrp="1"/>
           </p:cNvSpPr>
@@ -20575,7 +20575,7 @@
       </p:sp>
       <p:graphicFrame>
         <p:nvGraphicFramePr>
-          <p:cNvPr id="366005179" name="Google Shape;155;p19"/>
+          <p:cNvPr id="605094529" name="Google Shape;155;p19"/>
           <p:cNvGraphicFramePr>
             <a:graphicFrameLocks xmlns:a="http://schemas.openxmlformats.org/drawingml/2006/main"/>
           </p:cNvGraphicFramePr>
@@ -21201,7 +21201,7 @@
       </p:graphicFrame>
       <p:sp>
         <p:nvSpPr>
-          <p:cNvPr id="1210754764" name="Google Shape;152;p19"/>
+          <p:cNvPr id="961614622" name="Google Shape;152;p19"/>
           <p:cNvSpPr txBox="1"/>
           <p:nvPr/>
         </p:nvSpPr>
@@ -21492,7 +21492,7 @@
       </p:sp>
       <p:pic>
         <p:nvPicPr>
-          <p:cNvPr id="1983560599" name="Picture 771403449"/>
+          <p:cNvPr id="1396277700" name="Picture 771403449"/>
           <p:cNvPicPr>
             <a:picLocks noChangeAspect="1"/>
           </p:cNvPicPr>
@@ -21547,7 +21547,7 @@
       </p:grpSpPr>
       <p:sp>
         <p:nvSpPr>
-          <p:cNvPr id="743404921" name="Google Shape;236;p28"/>
+          <p:cNvPr id="1376244051" name="Google Shape;236;p28"/>
           <p:cNvSpPr txBox="1">
             <a:spLocks noGrp="1"/>
           </p:cNvSpPr>
@@ -21660,7 +21660,7 @@
       </p:sp>
       <p:sp>
         <p:nvSpPr>
-          <p:cNvPr id="1594908627" name="Google Shape;237;p28"/>
+          <p:cNvPr id="319266971" name="Google Shape;237;p28"/>
           <p:cNvSpPr txBox="1">
             <a:spLocks noGrp="1"/>
           </p:cNvSpPr>
@@ -21720,7 +21720,7 @@
       </p:sp>
       <p:pic>
         <p:nvPicPr>
-          <p:cNvPr id="630367270" name="Picture 1144095846"/>
+          <p:cNvPr id="1450245152" name="Picture 1144095846"/>
           <p:cNvPicPr>
             <a:picLocks noChangeAspect="1"/>
           </p:cNvPicPr>
@@ -21775,7 +21775,7 @@
       </p:grpSpPr>
       <p:sp>
         <p:nvSpPr>
-          <p:cNvPr id="807041644" name="Google Shape;164;p20"/>
+          <p:cNvPr id="1725201963" name="Google Shape;164;p20"/>
           <p:cNvSpPr txBox="1">
             <a:spLocks noGrp="1"/>
           </p:cNvSpPr>
@@ -21833,7 +21833,7 @@
       </p:sp>
       <p:sp>
         <p:nvSpPr>
-          <p:cNvPr id="753215218" name="Google Shape;165;p20"/>
+          <p:cNvPr id="706136014" name="Google Shape;165;p20"/>
           <p:cNvSpPr txBox="1">
             <a:spLocks noGrp="1"/>
           </p:cNvSpPr>
@@ -22069,7 +22069,7 @@
       </p:sp>
       <p:sp>
         <p:nvSpPr>
-          <p:cNvPr id="907880574" name="Google Shape;166;p20"/>
+          <p:cNvPr id="921831284" name="Google Shape;166;p20"/>
           <p:cNvSpPr txBox="1">
             <a:spLocks noGrp="1"/>
           </p:cNvSpPr>
@@ -22121,7 +22121,7 @@
       </p:sp>
       <p:pic>
         <p:nvPicPr>
-          <p:cNvPr id="536858234" name="Picture 2056442618"/>
+          <p:cNvPr id="1151410581" name="Picture 2056442618"/>
           <p:cNvPicPr>
             <a:picLocks noChangeAspect="1"/>
           </p:cNvPicPr>
@@ -22176,7 +22176,7 @@
       </p:grpSpPr>
       <p:sp>
         <p:nvSpPr>
-          <p:cNvPr id="1898097794" name="Google Shape;176;p21"/>
+          <p:cNvPr id="80157479" name="Google Shape;176;p21"/>
           <p:cNvSpPr txBox="1">
             <a:spLocks noGrp="1"/>
           </p:cNvSpPr>
@@ -22234,7 +22234,7 @@
       </p:sp>
       <p:sp>
         <p:nvSpPr>
-          <p:cNvPr id="1193101910" name="Google Shape;177;p21"/>
+          <p:cNvPr id="2003296947" name="Google Shape;177;p21"/>
           <p:cNvSpPr txBox="1">
             <a:spLocks noGrp="1"/>
           </p:cNvSpPr>
@@ -22294,7 +22294,7 @@
       </p:sp>
       <p:sp>
         <p:nvSpPr>
-          <p:cNvPr id="45714374" name="Google Shape;178;p21"/>
+          <p:cNvPr id="548706353" name="Google Shape;178;p21"/>
           <p:cNvSpPr txBox="1">
             <a:spLocks noGrp="1"/>
           </p:cNvSpPr>
@@ -22354,7 +22354,7 @@
       </p:sp>
       <p:pic>
         <p:nvPicPr>
-          <p:cNvPr id="680722151" name="Picture 1093578669"/>
+          <p:cNvPr id="856916891" name="Picture 1093578669"/>
           <p:cNvPicPr>
             <a:picLocks noChangeAspect="1"/>
           </p:cNvPicPr>
@@ -22409,7 +22409,7 @@
       </p:grpSpPr>
       <p:sp>
         <p:nvSpPr>
-          <p:cNvPr id="575580021" name="Google Shape;184;p22"/>
+          <p:cNvPr id="1247007240" name="Google Shape;184;p22"/>
           <p:cNvSpPr txBox="1">
             <a:spLocks noGrp="1"/>
           </p:cNvSpPr>
@@ -22456,7 +22456,7 @@
       </p:sp>
       <p:sp>
         <p:nvSpPr>
-          <p:cNvPr id="1430408840" name="Google Shape;185;p22"/>
+          <p:cNvPr id="1548955733" name="Google Shape;185;p22"/>
           <p:cNvSpPr txBox="1">
             <a:spLocks noGrp="1"/>
           </p:cNvSpPr>
@@ -22618,7 +22618,7 @@
       </p:sp>
       <p:sp>
         <p:nvSpPr>
-          <p:cNvPr id="213627421" name="Google Shape;186;p22"/>
+          <p:cNvPr id="1595253999" name="Google Shape;186;p22"/>
           <p:cNvSpPr txBox="1">
             <a:spLocks noGrp="1"/>
           </p:cNvSpPr>
@@ -22670,7 +22670,7 @@
       </p:sp>
       <p:pic>
         <p:nvPicPr>
-          <p:cNvPr id="2022683612" name="Picture 1373499289"/>
+          <p:cNvPr id="505673200" name="Picture 1373499289"/>
           <p:cNvPicPr>
             <a:picLocks noChangeAspect="1"/>
           </p:cNvPicPr>
@@ -22725,7 +22725,7 @@
       </p:grpSpPr>
       <p:sp>
         <p:nvSpPr>
-          <p:cNvPr id="1847147944" name="Google Shape;195;p23"/>
+          <p:cNvPr id="50921149" name="Google Shape;195;p23"/>
           <p:cNvSpPr txBox="1">
             <a:spLocks noGrp="1"/>
           </p:cNvSpPr>
@@ -22769,7 +22769,7 @@
       </p:sp>
       <p:sp>
         <p:nvSpPr>
-          <p:cNvPr id="98580116" name="Google Shape;197;p23"/>
+          <p:cNvPr id="673961673" name="Google Shape;197;p23"/>
           <p:cNvSpPr txBox="1">
             <a:spLocks noGrp="1"/>
           </p:cNvSpPr>
@@ -22829,7 +22829,7 @@
       </p:sp>
       <p:pic>
         <p:nvPicPr>
-          <p:cNvPr id="1483183032" name="Picture 310112395"/>
+          <p:cNvPr id="1425187580" name="Picture 310112395"/>
           <p:cNvPicPr>
             <a:picLocks noChangeAspect="1"/>
           </p:cNvPicPr>
@@ -22851,14 +22851,14 @@
       </p:pic>
       <p:sp>
         <p:nvSpPr>
-          <p:cNvPr id="1292361075" name="TextBox 1"/>
+          <p:cNvPr id="1806859249" name="TextBox 1"/>
           <p:cNvSpPr txBox="1"/>
           <p:nvPr/>
         </p:nvSpPr>
         <p:spPr bwMode="auto">
           <a:xfrm>
-            <a:off x="1744068" y="1814678"/>
-            <a:ext cx="5664690" cy="2862322"/>
+            <a:off x="1744067" y="1814677"/>
+            <a:ext cx="5665409" cy="1920600"/>
           </a:xfrm>
           <a:prstGeom prst="rect">
             <a:avLst/>
@@ -22871,23 +22871,6 @@
             <a:spAutoFit/>
           </a:bodyPr>
           <a:lstStyle/>
-          <a:p>
-            <a:pPr marL="342900" indent="-342900">
-              <a:lnSpc>
-                <a:spcPts val="2400"/>
-              </a:lnSpc>
-              <a:buChar char="•"/>
-              <a:defRPr/>
-            </a:pPr>
-            <a:r>
-              <a:rPr lang="en-US" sz="2000" b="1">
-                <a:latin typeface="Corbel"/>
-                <a:cs typeface="Segoe UI"/>
-              </a:rPr>
-              <a:t>Google Single Sign-On(SSO): Used to keep track of emails, and utilize the vast resources of Google OAuth API.</a:t>
-            </a:r>
-            <a:endParaRPr/>
-          </a:p>
           <a:p>
             <a:pPr marL="342900" indent="-342900">
               <a:lnSpc>
@@ -22986,7 +22969,7 @@
       </p:grpSpPr>
       <p:sp>
         <p:nvSpPr>
-          <p:cNvPr id="215297250" name="Google Shape;207;p24"/>
+          <p:cNvPr id="1733665724" name="Google Shape;207;p24"/>
           <p:cNvSpPr txBox="1">
             <a:spLocks noGrp="1"/>
           </p:cNvSpPr>
@@ -23030,7 +23013,7 @@
       </p:sp>
       <p:sp>
         <p:nvSpPr>
-          <p:cNvPr id="1696446545" name="Google Shape;209;p24"/>
+          <p:cNvPr id="568015851" name="Google Shape;209;p24"/>
           <p:cNvSpPr txBox="1">
             <a:spLocks noGrp="1"/>
           </p:cNvSpPr>
@@ -23090,7 +23073,7 @@
       </p:sp>
       <p:pic>
         <p:nvPicPr>
-          <p:cNvPr id="33534670" name="Picture 1833725920"/>
+          <p:cNvPr id="1214149846" name="Picture 1833725920"/>
           <p:cNvPicPr>
             <a:picLocks noChangeAspect="1"/>
           </p:cNvPicPr>
@@ -23112,7 +23095,7 @@
       </p:pic>
       <p:pic>
         <p:nvPicPr>
-          <p:cNvPr id="151326269" name="Picture 2" descr="A screenshot of a computer&#10;&#10;AI-generated content may be incorrect."/>
+          <p:cNvPr id="1766422136" name="Picture 2" descr="A screenshot of a computer&#10;&#10;AI-generated content may be incorrect."/>
           <p:cNvPicPr>
             <a:picLocks noChangeAspect="1"/>
           </p:cNvPicPr>
@@ -23134,7 +23117,7 @@
       </p:pic>
       <p:pic>
         <p:nvPicPr>
-          <p:cNvPr id="1136416076" name="Picture 4" descr="A white background with black text&#10;&#10;AI-generated content may be incorrect."/>
+          <p:cNvPr id="104428953" name="Picture 4" descr="A white background with black text&#10;&#10;AI-generated content may be incorrect."/>
           <p:cNvPicPr>
             <a:picLocks noChangeAspect="1"/>
           </p:cNvPicPr>
@@ -23156,7 +23139,7 @@
       </p:pic>
       <p:pic>
         <p:nvPicPr>
-          <p:cNvPr id="1454935453" name="Picture 8" descr="A white background with black text&#10;&#10;AI-generated content may be incorrect."/>
+          <p:cNvPr id="1256122224" name="Picture 8" descr="A white background with black text&#10;&#10;AI-generated content may be incorrect."/>
           <p:cNvPicPr>
             <a:picLocks noChangeAspect="1"/>
           </p:cNvPicPr>
@@ -23211,7 +23194,7 @@
       </p:grpSpPr>
       <p:sp>
         <p:nvSpPr>
-          <p:cNvPr id="1131860188" name="Google Shape;217;p25"/>
+          <p:cNvPr id="1403942218" name="Google Shape;217;p25"/>
           <p:cNvSpPr txBox="1">
             <a:spLocks noGrp="1"/>
           </p:cNvSpPr>
@@ -23263,7 +23246,7 @@
       </p:sp>
       <p:pic>
         <p:nvPicPr>
-          <p:cNvPr id="1943188377" name="Picture 1800655655"/>
+          <p:cNvPr id="112434836" name="Picture 1800655655"/>
           <p:cNvPicPr>
             <a:picLocks noChangeAspect="1"/>
           </p:cNvPicPr>
@@ -23283,31 +23266,9 @@
           </a:prstGeom>
         </p:spPr>
       </p:pic>
-      <p:pic>
-        <p:nvPicPr>
-          <p:cNvPr id="232130599" name="Picture 4" descr="Diagram of a diagram with text and words&#10;&#10;AI-generated content may be incorrect."/>
-          <p:cNvPicPr>
-            <a:picLocks noChangeAspect="1"/>
-          </p:cNvPicPr>
-          <p:nvPr/>
-        </p:nvPicPr>
-        <p:blipFill>
-          <a:blip r:embed="rId4"/>
-          <a:stretch/>
-        </p:blipFill>
-        <p:spPr bwMode="auto">
-          <a:xfrm>
-            <a:off x="1532710" y="1489166"/>
-            <a:ext cx="6818810" cy="4812958"/>
-          </a:xfrm>
-          <a:prstGeom prst="rect">
-            <a:avLst/>
-          </a:prstGeom>
-        </p:spPr>
-      </p:pic>
       <p:sp>
         <p:nvSpPr>
-          <p:cNvPr id="1964200898" name="Title 6"/>
+          <p:cNvPr id="1620593212" name="Title 6"/>
           <p:cNvSpPr>
             <a:spLocks noGrp="1"/>
           </p:cNvSpPr>
@@ -23336,6 +23297,28 @@
           </a:p>
         </p:txBody>
       </p:sp>
+      <p:pic>
+        <p:nvPicPr>
+          <p:cNvPr id="198937962" name=""/>
+          <p:cNvPicPr>
+            <a:picLocks noChangeAspect="1"/>
+          </p:cNvPicPr>
+          <p:nvPr/>
+        </p:nvPicPr>
+        <p:blipFill>
+          <a:blip r:embed="rId4"/>
+          <a:stretch/>
+        </p:blipFill>
+        <p:spPr bwMode="auto">
+          <a:xfrm flipH="0" flipV="0">
+            <a:off x="1595911" y="1489165"/>
+            <a:ext cx="5952177" cy="4625945"/>
+          </a:xfrm>
+          <a:prstGeom prst="rect">
+            <a:avLst/>
+          </a:prstGeom>
+        </p:spPr>
+      </p:pic>
     </p:spTree>
   </p:cSld>
   <p:clrMapOvr>
@@ -23371,7 +23354,7 @@
       </p:grpSpPr>
       <p:sp>
         <p:nvSpPr>
-          <p:cNvPr id="13344094" name="Google Shape;222;p26"/>
+          <p:cNvPr id="1767007713" name="Google Shape;222;p26"/>
           <p:cNvSpPr txBox="1">
             <a:spLocks noGrp="1"/>
           </p:cNvSpPr>
@@ -23416,7 +23399,7 @@
       </p:sp>
       <p:sp>
         <p:nvSpPr>
-          <p:cNvPr id="400741762" name="Google Shape;224;p26"/>
+          <p:cNvPr id="908440503" name="Google Shape;224;p26"/>
           <p:cNvSpPr txBox="1">
             <a:spLocks noGrp="1"/>
           </p:cNvSpPr>
@@ -23468,7 +23451,7 @@
       </p:sp>
       <p:pic>
         <p:nvPicPr>
-          <p:cNvPr id="1291184172" name="Picture 12" descr="A screenshot of a contact form"/>
+          <p:cNvPr id="519078365" name="Picture 12" descr="A screenshot of a contact form"/>
           <p:cNvPicPr>
             <a:picLocks noChangeAspect="1"/>
           </p:cNvPicPr>
@@ -23480,7 +23463,7 @@
         </p:blipFill>
         <p:spPr bwMode="auto">
           <a:xfrm>
-            <a:off x="931817" y="1968554"/>
+            <a:off x="931816" y="1893105"/>
             <a:ext cx="1860069" cy="3305409"/>
           </a:xfrm>
           <a:prstGeom prst="rect">
@@ -23490,7 +23473,7 @@
       </p:pic>
       <p:pic>
         <p:nvPicPr>
-          <p:cNvPr id="2110104623" name="Picture 14" descr="A sign in with google&#10;&#10;AI-generated content may be incorrect."/>
+          <p:cNvPr id="607206073" name="Picture 16" descr="A screenshot of a application form&#10;&#10;AI-generated content may be incorrect."/>
           <p:cNvPicPr>
             <a:picLocks noChangeAspect="1"/>
           </p:cNvPicPr>
@@ -23498,28 +23481,6 @@
         </p:nvPicPr>
         <p:blipFill>
           <a:blip r:embed="rId4"/>
-          <a:stretch/>
-        </p:blipFill>
-        <p:spPr bwMode="auto">
-          <a:xfrm>
-            <a:off x="3055741" y="1956246"/>
-            <a:ext cx="1767839" cy="3305409"/>
-          </a:xfrm>
-          <a:prstGeom prst="rect">
-            <a:avLst/>
-          </a:prstGeom>
-        </p:spPr>
-      </p:pic>
-      <p:pic>
-        <p:nvPicPr>
-          <p:cNvPr id="1476493023" name="Picture 16" descr="A screenshot of a application form&#10;&#10;AI-generated content may be incorrect."/>
-          <p:cNvPicPr>
-            <a:picLocks noChangeAspect="1"/>
-          </p:cNvPicPr>
-          <p:nvPr/>
-        </p:nvPicPr>
-        <p:blipFill>
-          <a:blip r:embed="rId5"/>
           <a:stretch/>
         </p:blipFill>
         <p:spPr bwMode="auto">
@@ -23534,7 +23495,29 @@
       </p:pic>
       <p:pic>
         <p:nvPicPr>
-          <p:cNvPr id="1490384552" name="Picture 18" descr="A white background with pink and black lines&#10;&#10;AI-generated content may be incorrect."/>
+          <p:cNvPr id="1436600538" name="Picture 18" descr="A white background with pink and black lines&#10;&#10;AI-generated content may be incorrect."/>
+          <p:cNvPicPr>
+            <a:picLocks noChangeAspect="1"/>
+          </p:cNvPicPr>
+          <p:nvPr/>
+        </p:nvPicPr>
+        <p:blipFill>
+          <a:blip r:embed="rId5"/>
+          <a:stretch/>
+        </p:blipFill>
+        <p:spPr bwMode="auto">
+          <a:xfrm>
+            <a:off x="6963795" y="1827793"/>
+            <a:ext cx="1653732" cy="3370721"/>
+          </a:xfrm>
+          <a:prstGeom prst="rect">
+            <a:avLst/>
+          </a:prstGeom>
+        </p:spPr>
+      </p:pic>
+      <p:pic>
+        <p:nvPicPr>
+          <p:cNvPr id="1406367272" name=""/>
           <p:cNvPicPr>
             <a:picLocks noChangeAspect="1"/>
           </p:cNvPicPr>
@@ -23545,9 +23528,9 @@
           <a:stretch/>
         </p:blipFill>
         <p:spPr bwMode="auto">
-          <a:xfrm>
-            <a:off x="7033068" y="1827794"/>
-            <a:ext cx="1653732" cy="3370721"/>
+          <a:xfrm flipH="0" flipV="0">
+            <a:off x="3185202" y="1893105"/>
+            <a:ext cx="1624298" cy="3305408"/>
           </a:xfrm>
           <a:prstGeom prst="rect">
             <a:avLst/>
@@ -23589,7 +23572,7 @@
       </p:grpSpPr>
       <p:sp>
         <p:nvSpPr>
-          <p:cNvPr id="1482470311" name="Google Shape;229;p27"/>
+          <p:cNvPr id="697827945" name="Google Shape;229;p27"/>
           <p:cNvSpPr txBox="1">
             <a:spLocks noGrp="1"/>
           </p:cNvSpPr>
@@ -23645,7 +23628,7 @@
       </p:sp>
       <p:sp>
         <p:nvSpPr>
-          <p:cNvPr id="1158824644" name="Google Shape;230;p27"/>
+          <p:cNvPr id="909904826" name="Google Shape;230;p27"/>
           <p:cNvSpPr txBox="1">
             <a:spLocks noGrp="1"/>
           </p:cNvSpPr>
@@ -24133,7 +24116,7 @@
       </p:sp>
       <p:sp>
         <p:nvSpPr>
-          <p:cNvPr id="883843519" name="Google Shape;231;p27"/>
+          <p:cNvPr id="1773191327" name="Google Shape;231;p27"/>
           <p:cNvSpPr txBox="1">
             <a:spLocks noGrp="1"/>
           </p:cNvSpPr>
@@ -24185,7 +24168,7 @@
       </p:sp>
       <p:pic>
         <p:nvPicPr>
-          <p:cNvPr id="1098282669" name="Picture 423212213"/>
+          <p:cNvPr id="927194827" name="Picture 423212213"/>
           <p:cNvPicPr>
             <a:picLocks noChangeAspect="1"/>
           </p:cNvPicPr>
